--- a/rapport_folder/Placeholder_PowerPoint.pptx
+++ b/rapport_folder/Placeholder_PowerPoint.pptx
@@ -121,7 +121,7 @@
 <file path=ppt/revisionInfo.xml><?xml version="1.0" encoding="utf-8"?>
 <p1510:revInfo xmlns:a="http://schemas.openxmlformats.org/drawingml/2006/main" xmlns:r="http://schemas.openxmlformats.org/officeDocument/2006/relationships" xmlns:p1510="http://schemas.microsoft.com/office/powerpoint/2015/10/main">
   <p1510:revLst>
-    <p1510:client id="{C80DAAF8-6D02-4C02-B44C-E6EC11291832}" v="16" dt="2026-04-21T16:14:03.139"/>
+    <p1510:client id="{C80DAAF8-6D02-4C02-B44C-E6EC11291832}" v="24" dt="2026-04-22T07:31:13.348"/>
   </p1510:revLst>
 </p1510:revInfo>
 </file>
@@ -131,12 +131,12 @@
   <pc:docChgLst>
     <pc:chgData name="Jonas Lindström" userId="e2164e0498dd284e" providerId="LiveId" clId="{7A0E95E1-3C7A-43FC-80A2-7D6B146ED67F}"/>
     <pc:docChg chg="undo custSel addSld modSld sldOrd">
-      <pc:chgData name="Jonas Lindström" userId="e2164e0498dd284e" providerId="LiveId" clId="{7A0E95E1-3C7A-43FC-80A2-7D6B146ED67F}" dt="2026-04-21T16:14:09.113" v="271" actId="27636"/>
+      <pc:chgData name="Jonas Lindström" userId="e2164e0498dd284e" providerId="LiveId" clId="{7A0E95E1-3C7A-43FC-80A2-7D6B146ED67F}" dt="2026-04-22T07:41:05.092" v="1020" actId="1076"/>
       <pc:docMkLst>
         <pc:docMk/>
       </pc:docMkLst>
       <pc:sldChg chg="addSp modSp mod">
-        <pc:chgData name="Jonas Lindström" userId="e2164e0498dd284e" providerId="LiveId" clId="{7A0E95E1-3C7A-43FC-80A2-7D6B146ED67F}" dt="2026-04-21T15:59:58.792" v="147" actId="1076"/>
+        <pc:chgData name="Jonas Lindström" userId="e2164e0498dd284e" providerId="LiveId" clId="{7A0E95E1-3C7A-43FC-80A2-7D6B146ED67F}" dt="2026-04-22T07:12:57.036" v="436" actId="20577"/>
         <pc:sldMkLst>
           <pc:docMk/>
           <pc:sldMk cId="3953451600" sldId="256"/>
@@ -150,7 +150,7 @@
           </ac:spMkLst>
         </pc:spChg>
         <pc:spChg chg="mod">
-          <ac:chgData name="Jonas Lindström" userId="e2164e0498dd284e" providerId="LiveId" clId="{7A0E95E1-3C7A-43FC-80A2-7D6B146ED67F}" dt="2026-04-21T15:59:58.792" v="147" actId="1076"/>
+          <ac:chgData name="Jonas Lindström" userId="e2164e0498dd284e" providerId="LiveId" clId="{7A0E95E1-3C7A-43FC-80A2-7D6B146ED67F}" dt="2026-04-22T07:12:57.036" v="436" actId="20577"/>
           <ac:spMkLst>
             <pc:docMk/>
             <pc:sldMk cId="3953451600" sldId="256"/>
@@ -158,7 +158,7 @@
           </ac:spMkLst>
         </pc:spChg>
         <pc:spChg chg="add mod">
-          <ac:chgData name="Jonas Lindström" userId="e2164e0498dd284e" providerId="LiveId" clId="{7A0E95E1-3C7A-43FC-80A2-7D6B146ED67F}" dt="2026-04-21T15:59:39.808" v="145" actId="1076"/>
+          <ac:chgData name="Jonas Lindström" userId="e2164e0498dd284e" providerId="LiveId" clId="{7A0E95E1-3C7A-43FC-80A2-7D6B146ED67F}" dt="2026-04-22T07:08:02.417" v="303"/>
           <ac:spMkLst>
             <pc:docMk/>
             <pc:sldMk cId="3953451600" sldId="256"/>
@@ -167,7 +167,7 @@
         </pc:spChg>
       </pc:sldChg>
       <pc:sldChg chg="modSp new mod">
-        <pc:chgData name="Jonas Lindström" userId="e2164e0498dd284e" providerId="LiveId" clId="{7A0E95E1-3C7A-43FC-80A2-7D6B146ED67F}" dt="2026-04-21T16:05:38.473" v="229" actId="20577"/>
+        <pc:chgData name="Jonas Lindström" userId="e2164e0498dd284e" providerId="LiveId" clId="{7A0E95E1-3C7A-43FC-80A2-7D6B146ED67F}" dt="2026-04-22T07:20:46.076" v="680" actId="1076"/>
         <pc:sldMkLst>
           <pc:docMk/>
           <pc:sldMk cId="2859858017" sldId="257"/>
@@ -181,7 +181,7 @@
           </ac:spMkLst>
         </pc:spChg>
         <pc:spChg chg="mod">
-          <ac:chgData name="Jonas Lindström" userId="e2164e0498dd284e" providerId="LiveId" clId="{7A0E95E1-3C7A-43FC-80A2-7D6B146ED67F}" dt="2026-04-21T16:01:53.351" v="218" actId="20577"/>
+          <ac:chgData name="Jonas Lindström" userId="e2164e0498dd284e" providerId="LiveId" clId="{7A0E95E1-3C7A-43FC-80A2-7D6B146ED67F}" dt="2026-04-22T07:20:46.076" v="680" actId="1076"/>
           <ac:spMkLst>
             <pc:docMk/>
             <pc:sldMk cId="2859858017" sldId="257"/>
@@ -190,7 +190,7 @@
         </pc:spChg>
       </pc:sldChg>
       <pc:sldChg chg="addSp delSp modSp new mod ord">
-        <pc:chgData name="Jonas Lindström" userId="e2164e0498dd284e" providerId="LiveId" clId="{7A0E95E1-3C7A-43FC-80A2-7D6B146ED67F}" dt="2026-04-21T16:08:32.529" v="230" actId="931"/>
+        <pc:chgData name="Jonas Lindström" userId="e2164e0498dd284e" providerId="LiveId" clId="{7A0E95E1-3C7A-43FC-80A2-7D6B146ED67F}" dt="2026-04-22T07:24:30.531" v="683" actId="1076"/>
         <pc:sldMkLst>
           <pc:docMk/>
           <pc:sldMk cId="492862340" sldId="258"/>
@@ -211,8 +211,16 @@
             <ac:spMk id="3" creationId="{D0A0FEF1-FF30-12FD-921A-A06D961EB046}"/>
           </ac:spMkLst>
         </pc:spChg>
+        <pc:picChg chg="add mod">
+          <ac:chgData name="Jonas Lindström" userId="e2164e0498dd284e" providerId="LiveId" clId="{7A0E95E1-3C7A-43FC-80A2-7D6B146ED67F}" dt="2026-04-22T07:24:25.891" v="682" actId="1076"/>
+          <ac:picMkLst>
+            <pc:docMk/>
+            <pc:sldMk cId="492862340" sldId="258"/>
+            <ac:picMk id="4" creationId="{766AD128-63E8-4787-9A55-DD4C98606A35}"/>
+          </ac:picMkLst>
+        </pc:picChg>
         <pc:picChg chg="add mod ord">
-          <ac:chgData name="Jonas Lindström" userId="e2164e0498dd284e" providerId="LiveId" clId="{7A0E95E1-3C7A-43FC-80A2-7D6B146ED67F}" dt="2026-04-21T16:08:32.529" v="230" actId="931"/>
+          <ac:chgData name="Jonas Lindström" userId="e2164e0498dd284e" providerId="LiveId" clId="{7A0E95E1-3C7A-43FC-80A2-7D6B146ED67F}" dt="2026-04-22T07:24:30.531" v="683" actId="1076"/>
           <ac:picMkLst>
             <pc:docMk/>
             <pc:sldMk cId="492862340" sldId="258"/>
@@ -268,13 +276,13 @@
         </pc:picChg>
       </pc:sldChg>
       <pc:sldChg chg="addSp delSp modSp new mod">
-        <pc:chgData name="Jonas Lindström" userId="e2164e0498dd284e" providerId="LiveId" clId="{7A0E95E1-3C7A-43FC-80A2-7D6B146ED67F}" dt="2026-04-21T16:12:34.824" v="246" actId="931"/>
+        <pc:chgData name="Jonas Lindström" userId="e2164e0498dd284e" providerId="LiveId" clId="{7A0E95E1-3C7A-43FC-80A2-7D6B146ED67F}" dt="2026-04-22T07:41:05.092" v="1020" actId="1076"/>
         <pc:sldMkLst>
           <pc:docMk/>
           <pc:sldMk cId="3192255978" sldId="260"/>
         </pc:sldMkLst>
         <pc:spChg chg="mod">
-          <ac:chgData name="Jonas Lindström" userId="e2164e0498dd284e" providerId="LiveId" clId="{7A0E95E1-3C7A-43FC-80A2-7D6B146ED67F}" dt="2026-04-21T16:12:26.154" v="245" actId="122"/>
+          <ac:chgData name="Jonas Lindström" userId="e2164e0498dd284e" providerId="LiveId" clId="{7A0E95E1-3C7A-43FC-80A2-7D6B146ED67F}" dt="2026-04-22T07:07:54.451" v="302" actId="20577"/>
           <ac:spMkLst>
             <pc:docMk/>
             <pc:sldMk cId="3192255978" sldId="260"/>
@@ -289,8 +297,16 @@
             <ac:spMk id="3" creationId="{97DCD4CB-DA5C-CE2A-26BB-5ADD849060A9}"/>
           </ac:spMkLst>
         </pc:spChg>
+        <pc:picChg chg="add mod">
+          <ac:chgData name="Jonas Lindström" userId="e2164e0498dd284e" providerId="LiveId" clId="{7A0E95E1-3C7A-43FC-80A2-7D6B146ED67F}" dt="2026-04-22T07:27:09.900" v="685" actId="1076"/>
+          <ac:picMkLst>
+            <pc:docMk/>
+            <pc:sldMk cId="3192255978" sldId="260"/>
+            <ac:picMk id="4" creationId="{4087E303-6F7C-EB9B-DA6F-6AED49E501D8}"/>
+          </ac:picMkLst>
+        </pc:picChg>
         <pc:picChg chg="add mod ord">
-          <ac:chgData name="Jonas Lindström" userId="e2164e0498dd284e" providerId="LiveId" clId="{7A0E95E1-3C7A-43FC-80A2-7D6B146ED67F}" dt="2026-04-21T16:12:34.824" v="246" actId="931"/>
+          <ac:chgData name="Jonas Lindström" userId="e2164e0498dd284e" providerId="LiveId" clId="{7A0E95E1-3C7A-43FC-80A2-7D6B146ED67F}" dt="2026-04-22T07:41:05.092" v="1020" actId="1076"/>
           <ac:picMkLst>
             <pc:docMk/>
             <pc:sldMk cId="3192255978" sldId="260"/>
@@ -298,8 +314,8 @@
           </ac:picMkLst>
         </pc:picChg>
       </pc:sldChg>
-      <pc:sldChg chg="modSp new mod">
-        <pc:chgData name="Jonas Lindström" userId="e2164e0498dd284e" providerId="LiveId" clId="{7A0E95E1-3C7A-43FC-80A2-7D6B146ED67F}" dt="2026-04-21T16:13:40.457" v="261" actId="20577"/>
+      <pc:sldChg chg="addSp modSp new mod">
+        <pc:chgData name="Jonas Lindström" userId="e2164e0498dd284e" providerId="LiveId" clId="{7A0E95E1-3C7A-43FC-80A2-7D6B146ED67F}" dt="2026-04-22T07:37:25.371" v="1019" actId="20577"/>
         <pc:sldMkLst>
           <pc:docMk/>
           <pc:sldMk cId="4041843504" sldId="261"/>
@@ -313,11 +329,19 @@
           </ac:spMkLst>
         </pc:spChg>
         <pc:spChg chg="mod">
-          <ac:chgData name="Jonas Lindström" userId="e2164e0498dd284e" providerId="LiveId" clId="{7A0E95E1-3C7A-43FC-80A2-7D6B146ED67F}" dt="2026-04-21T16:13:40.457" v="261" actId="20577"/>
+          <ac:chgData name="Jonas Lindström" userId="e2164e0498dd284e" providerId="LiveId" clId="{7A0E95E1-3C7A-43FC-80A2-7D6B146ED67F}" dt="2026-04-22T07:37:25.371" v="1019" actId="20577"/>
           <ac:spMkLst>
             <pc:docMk/>
             <pc:sldMk cId="4041843504" sldId="261"/>
             <ac:spMk id="3" creationId="{E0FE7084-07EF-DDF5-B5B9-964FB7E887B6}"/>
+          </ac:spMkLst>
+        </pc:spChg>
+        <pc:spChg chg="add mod">
+          <ac:chgData name="Jonas Lindström" userId="e2164e0498dd284e" providerId="LiveId" clId="{7A0E95E1-3C7A-43FC-80A2-7D6B146ED67F}" dt="2026-04-22T07:31:25.595" v="690" actId="1076"/>
+          <ac:spMkLst>
+            <pc:docMk/>
+            <pc:sldMk cId="4041843504" sldId="261"/>
+            <ac:spMk id="4" creationId="{4323BC24-0AD7-6231-FE49-3509435959E4}"/>
           </ac:spMkLst>
         </pc:spChg>
       </pc:sldChg>
@@ -496,7 +520,7 @@
           <a:p>
             <a:fld id="{528EDDF1-0042-44C4-AB81-83CA40A64AE8}" type="datetimeFigureOut">
               <a:rPr lang="sv-SE" smtClean="0"/>
-              <a:t>2026-04-21</a:t>
+              <a:t>2026-04-22</a:t>
             </a:fld>
             <a:endParaRPr lang="sv-SE"/>
           </a:p>
@@ -694,7 +718,7 @@
           <a:p>
             <a:fld id="{528EDDF1-0042-44C4-AB81-83CA40A64AE8}" type="datetimeFigureOut">
               <a:rPr lang="sv-SE" smtClean="0"/>
-              <a:t>2026-04-21</a:t>
+              <a:t>2026-04-22</a:t>
             </a:fld>
             <a:endParaRPr lang="sv-SE"/>
           </a:p>
@@ -902,7 +926,7 @@
           <a:p>
             <a:fld id="{528EDDF1-0042-44C4-AB81-83CA40A64AE8}" type="datetimeFigureOut">
               <a:rPr lang="sv-SE" smtClean="0"/>
-              <a:t>2026-04-21</a:t>
+              <a:t>2026-04-22</a:t>
             </a:fld>
             <a:endParaRPr lang="sv-SE"/>
           </a:p>
@@ -1100,7 +1124,7 @@
           <a:p>
             <a:fld id="{528EDDF1-0042-44C4-AB81-83CA40A64AE8}" type="datetimeFigureOut">
               <a:rPr lang="sv-SE" smtClean="0"/>
-              <a:t>2026-04-21</a:t>
+              <a:t>2026-04-22</a:t>
             </a:fld>
             <a:endParaRPr lang="sv-SE"/>
           </a:p>
@@ -1375,7 +1399,7 @@
           <a:p>
             <a:fld id="{528EDDF1-0042-44C4-AB81-83CA40A64AE8}" type="datetimeFigureOut">
               <a:rPr lang="sv-SE" smtClean="0"/>
-              <a:t>2026-04-21</a:t>
+              <a:t>2026-04-22</a:t>
             </a:fld>
             <a:endParaRPr lang="sv-SE"/>
           </a:p>
@@ -1640,7 +1664,7 @@
           <a:p>
             <a:fld id="{528EDDF1-0042-44C4-AB81-83CA40A64AE8}" type="datetimeFigureOut">
               <a:rPr lang="sv-SE" smtClean="0"/>
-              <a:t>2026-04-21</a:t>
+              <a:t>2026-04-22</a:t>
             </a:fld>
             <a:endParaRPr lang="sv-SE"/>
           </a:p>
@@ -2052,7 +2076,7 @@
           <a:p>
             <a:fld id="{528EDDF1-0042-44C4-AB81-83CA40A64AE8}" type="datetimeFigureOut">
               <a:rPr lang="sv-SE" smtClean="0"/>
-              <a:t>2026-04-21</a:t>
+              <a:t>2026-04-22</a:t>
             </a:fld>
             <a:endParaRPr lang="sv-SE"/>
           </a:p>
@@ -2193,7 +2217,7 @@
           <a:p>
             <a:fld id="{528EDDF1-0042-44C4-AB81-83CA40A64AE8}" type="datetimeFigureOut">
               <a:rPr lang="sv-SE" smtClean="0"/>
-              <a:t>2026-04-21</a:t>
+              <a:t>2026-04-22</a:t>
             </a:fld>
             <a:endParaRPr lang="sv-SE"/>
           </a:p>
@@ -2306,7 +2330,7 @@
           <a:p>
             <a:fld id="{528EDDF1-0042-44C4-AB81-83CA40A64AE8}" type="datetimeFigureOut">
               <a:rPr lang="sv-SE" smtClean="0"/>
-              <a:t>2026-04-21</a:t>
+              <a:t>2026-04-22</a:t>
             </a:fld>
             <a:endParaRPr lang="sv-SE"/>
           </a:p>
@@ -2617,7 +2641,7 @@
           <a:p>
             <a:fld id="{528EDDF1-0042-44C4-AB81-83CA40A64AE8}" type="datetimeFigureOut">
               <a:rPr lang="sv-SE" smtClean="0"/>
-              <a:t>2026-04-21</a:t>
+              <a:t>2026-04-22</a:t>
             </a:fld>
             <a:endParaRPr lang="sv-SE"/>
           </a:p>
@@ -2905,7 +2929,7 @@
           <a:p>
             <a:fld id="{528EDDF1-0042-44C4-AB81-83CA40A64AE8}" type="datetimeFigureOut">
               <a:rPr lang="sv-SE" smtClean="0"/>
-              <a:t>2026-04-21</a:t>
+              <a:t>2026-04-22</a:t>
             </a:fld>
             <a:endParaRPr lang="sv-SE"/>
           </a:p>
@@ -3146,7 +3170,7 @@
           <a:p>
             <a:fld id="{528EDDF1-0042-44C4-AB81-83CA40A64AE8}" type="datetimeFigureOut">
               <a:rPr lang="sv-SE" smtClean="0"/>
-              <a:t>2026-04-21</a:t>
+              <a:t>2026-04-22</a:t>
             </a:fld>
             <a:endParaRPr lang="sv-SE"/>
           </a:p>
@@ -3632,12 +3656,14 @@
           </a:xfrm>
         </p:spPr>
         <p:txBody>
-          <a:bodyPr/>
+          <a:bodyPr>
+            <a:normAutofit/>
+          </a:bodyPr>
           <a:lstStyle/>
           <a:p>
             <a:r>
               <a:rPr lang="sv-SE" dirty="0"/>
-              <a:t>Syftet med arbetet var att analysera företagets orderdata för att få en bättre förståelse för försäljning, returer, kundbeteenden och betalningsmetoder. Målet var att använda data som underlag för beslut och att hitta mönster i vilka produktkategorier som driver mest försäljning, vilka produkter som oftare returneras och om olika betalningsmetoder verkar hänga ihop med olika ordervärden.</a:t>
+              <a:t>Syftet med arbetet var att analysera företagets orderdata för att få en bättre förståelse för försäljning, returer, kundbeteenden och betalningsmetoder. Målet var att använda data som underlag för beslut och att hitta mönster i vilka produktkategorier som driver mest försäljning, vilka betalningsmetoder som genererar mest försäljning och trafik.</a:t>
             </a:r>
           </a:p>
         </p:txBody>
@@ -3854,7 +3880,7 @@
           <a:p>
             <a:r>
               <a:rPr lang="sv-SE" sz="2000" dirty="0"/>
-              <a:t>Betalningsmetod mot enhetspris för att se fall om det finns en korrelation?</a:t>
+              <a:t>Betalningsmetod mot total intäkt och antal köp för att se fall om det finns en korrelation?</a:t>
             </a:r>
           </a:p>
         </p:txBody>
@@ -3934,9 +3960,16 @@
             <p:ph idx="1"/>
           </p:nvPr>
         </p:nvSpPr>
-        <p:spPr/>
-        <p:txBody>
-          <a:bodyPr/>
+        <p:spPr>
+          <a:xfrm>
+            <a:off x="838200" y="1739901"/>
+            <a:ext cx="10515600" cy="4406900"/>
+          </a:xfrm>
+        </p:spPr>
+        <p:txBody>
+          <a:bodyPr>
+            <a:normAutofit fontScale="92500" lnSpcReduction="20000"/>
+          </a:bodyPr>
           <a:lstStyle/>
           <a:p>
             <a:r>
@@ -3959,6 +3992,124 @@
             <a:r>
               <a:rPr lang="sv-SE" dirty="0"/>
               <a:t>Hantering av saknade värden (NA)</a:t>
+            </a:r>
+          </a:p>
+          <a:p>
+            <a:r>
+              <a:rPr lang="sv-SE" dirty="0"/>
+              <a:t>Trim på </a:t>
+            </a:r>
+            <a:r>
+              <a:rPr lang="sv-SE" dirty="0" err="1"/>
+              <a:t>lowercasevärden</a:t>
+            </a:r>
+            <a:endParaRPr lang="sv-SE" dirty="0"/>
+          </a:p>
+          <a:p>
+            <a:r>
+              <a:rPr lang="sv-SE" dirty="0"/>
+              <a:t>Ersatta saknade värden</a:t>
+            </a:r>
+            <a:br>
+              <a:rPr lang="sv-SE" dirty="0"/>
+            </a:br>
+            <a:r>
+              <a:rPr lang="sv-SE" dirty="0"/>
+              <a:t>- city, </a:t>
+            </a:r>
+            <a:r>
+              <a:rPr lang="sv-SE" dirty="0" err="1"/>
+              <a:t>payment_method</a:t>
+            </a:r>
+            <a:r>
+              <a:rPr lang="sv-SE" dirty="0"/>
+              <a:t>, </a:t>
+            </a:r>
+            <a:r>
+              <a:rPr lang="sv-SE" dirty="0" err="1"/>
+              <a:t>campaign_source</a:t>
+            </a:r>
+            <a:r>
+              <a:rPr lang="sv-SE" dirty="0"/>
+              <a:t> -&gt; </a:t>
+            </a:r>
+            <a:r>
+              <a:rPr lang="sv-SE" dirty="0" err="1"/>
+              <a:t>Unknown</a:t>
+            </a:r>
+            <a:br>
+              <a:rPr lang="sv-SE" dirty="0"/>
+            </a:br>
+            <a:r>
+              <a:rPr lang="sv-SE" dirty="0"/>
+              <a:t>- </a:t>
+            </a:r>
+            <a:r>
+              <a:rPr lang="sv-SE" dirty="0" err="1"/>
+              <a:t>discount_pct</a:t>
+            </a:r>
+            <a:r>
+              <a:rPr lang="sv-SE" dirty="0"/>
+              <a:t> och </a:t>
+            </a:r>
+            <a:r>
+              <a:rPr lang="sv-SE" dirty="0" err="1"/>
+              <a:t>shipment_days</a:t>
+            </a:r>
+            <a:r>
+              <a:rPr lang="sv-SE" dirty="0"/>
+              <a:t> -&gt; median</a:t>
+            </a:r>
+          </a:p>
+          <a:p>
+            <a:r>
+              <a:rPr lang="sv-SE" dirty="0"/>
+              <a:t>Nya features som</a:t>
+            </a:r>
+            <a:br>
+              <a:rPr lang="sv-SE" dirty="0"/>
+            </a:br>
+            <a:r>
+              <a:rPr lang="sv-SE" dirty="0"/>
+              <a:t>- </a:t>
+            </a:r>
+            <a:r>
+              <a:rPr lang="sv-SE" dirty="0" err="1"/>
+              <a:t>get_top_selling_categories</a:t>
+            </a:r>
+            <a:r>
+              <a:rPr lang="sv-SE" dirty="0"/>
+              <a:t>, </a:t>
+            </a:r>
+            <a:r>
+              <a:rPr lang="sv-SE" dirty="0" err="1"/>
+              <a:t>get_top_selling_subcategories</a:t>
+            </a:r>
+            <a:r>
+              <a:rPr lang="sv-SE" dirty="0"/>
+              <a:t> och </a:t>
+            </a:r>
+            <a:r>
+              <a:rPr lang="en-US" dirty="0" err="1"/>
+              <a:t>analyze_product_subcategory_vs_returns</a:t>
+            </a:r>
+            <a:r>
+              <a:rPr lang="en-US" dirty="0"/>
+              <a:t> och </a:t>
+            </a:r>
+            <a:r>
+              <a:rPr lang="en-US" dirty="0" err="1"/>
+              <a:t>analyze_unit_price_by_payment_method</a:t>
+            </a:r>
+            <a:endParaRPr lang="sv-SE" dirty="0"/>
+          </a:p>
+          <a:p>
+            <a:pPr marL="0" indent="0">
+              <a:buNone/>
+            </a:pPr>
+            <a:r>
+              <a:rPr lang="sv-SE" dirty="0"/>
+              <a:t>	</a:t>
             </a:r>
           </a:p>
         </p:txBody>
@@ -4058,8 +4209,38 @@
         </p:blipFill>
         <p:spPr>
           <a:xfrm>
-            <a:off x="2770704" y="1825625"/>
+            <a:off x="2824492" y="1077713"/>
             <a:ext cx="6650592" cy="4351338"/>
+          </a:xfrm>
+          <a:prstGeom prst="rect">
+            <a:avLst/>
+          </a:prstGeom>
+        </p:spPr>
+      </p:pic>
+      <p:pic>
+        <p:nvPicPr>
+          <p:cNvPr id="4" name="Bildobjekt 3">
+            <a:extLst>
+              <a:ext uri="{FF2B5EF4-FFF2-40B4-BE49-F238E27FC236}">
+                <a16:creationId xmlns:a16="http://schemas.microsoft.com/office/drawing/2014/main" id="{766AD128-63E8-4787-9A55-DD4C98606A35}"/>
+              </a:ext>
+            </a:extLst>
+          </p:cNvPr>
+          <p:cNvPicPr>
+            <a:picLocks noChangeAspect="1"/>
+          </p:cNvPicPr>
+          <p:nvPr/>
+        </p:nvPicPr>
+        <p:blipFill>
+          <a:blip r:embed="rId3"/>
+          <a:stretch>
+            <a:fillRect/>
+          </a:stretch>
+        </p:blipFill>
+        <p:spPr>
+          <a:xfrm>
+            <a:off x="2540687" y="5429051"/>
+            <a:ext cx="7554379" cy="1428949"/>
           </a:xfrm>
           <a:prstGeom prst="rect">
             <a:avLst/>
@@ -4221,7 +4402,7 @@
             <a:pPr algn="ctr"/>
             <a:r>
               <a:rPr lang="sv-SE" sz="4000" dirty="0"/>
-              <a:t>Betalningsmetod mot enhetspris för att se fall om det finns en korrelation?</a:t>
+              <a:t>Betalningsmetod mot total intäkt och antal köp för att se fall om det finns en korrelation?</a:t>
             </a:r>
             <a:br>
               <a:rPr lang="sv-SE" dirty="0"/>
@@ -4260,8 +4441,38 @@
         </p:blipFill>
         <p:spPr>
           <a:xfrm>
-            <a:off x="2770704" y="1825625"/>
+            <a:off x="1349117" y="1984375"/>
             <a:ext cx="6650592" cy="4351338"/>
+          </a:xfrm>
+          <a:prstGeom prst="rect">
+            <a:avLst/>
+          </a:prstGeom>
+        </p:spPr>
+      </p:pic>
+      <p:pic>
+        <p:nvPicPr>
+          <p:cNvPr id="4" name="Bildobjekt 3">
+            <a:extLst>
+              <a:ext uri="{FF2B5EF4-FFF2-40B4-BE49-F238E27FC236}">
+                <a16:creationId xmlns:a16="http://schemas.microsoft.com/office/drawing/2014/main" id="{4087E303-6F7C-EB9B-DA6F-6AED49E501D8}"/>
+              </a:ext>
+            </a:extLst>
+          </p:cNvPr>
+          <p:cNvPicPr>
+            <a:picLocks noChangeAspect="1"/>
+          </p:cNvPicPr>
+          <p:nvPr/>
+        </p:nvPicPr>
+        <p:blipFill>
+          <a:blip r:embed="rId3"/>
+          <a:stretch>
+            <a:fillRect/>
+          </a:stretch>
+        </p:blipFill>
+        <p:spPr>
+          <a:xfrm>
+            <a:off x="8510626" y="1609890"/>
+            <a:ext cx="3467584" cy="1648055"/>
           </a:xfrm>
           <a:prstGeom prst="rect">
             <a:avLst/>
@@ -4343,7 +4554,12 @@
             <p:ph idx="1"/>
           </p:nvPr>
         </p:nvSpPr>
-        <p:spPr/>
+        <p:spPr>
+          <a:xfrm>
+            <a:off x="838200" y="1793875"/>
+            <a:ext cx="10515600" cy="4351338"/>
+          </a:xfrm>
+        </p:spPr>
         <p:txBody>
           <a:bodyPr>
             <a:normAutofit fontScale="92500" lnSpcReduction="20000"/>
@@ -4353,68 +4569,287 @@
             <a:pPr marL="0" indent="0">
               <a:buNone/>
             </a:pPr>
-            <a:r>
+            <a:br>
               <a:rPr lang="sv-SE" dirty="0"/>
-              <a:t>Resultaten visar att elektronik var den kategori som drev högst försäljning, med en total omsättning på cirka 166 655. Därefter kom hem med cirka 65 353, sport med cirka 58 750, mode med cirka 34 540 och skönhet med cirka 13 020. Detta visar att elektronik är den klart viktigaste kategorin i </a:t>
+            </a:br>
+            <a:r>
+              <a:rPr lang="sv-SE" dirty="0"/>
+              <a:t>Försäljning i kategori – Elektronik</a:t>
+            </a:r>
+            <a:br>
+              <a:rPr lang="sv-SE" dirty="0"/>
+            </a:br>
+            <a:r>
+              <a:rPr lang="sv-SE" dirty="0"/>
+              <a:t>Omsättning – 166 655</a:t>
+            </a:r>
+          </a:p>
+          <a:p>
+            <a:pPr marL="0" indent="0">
+              <a:buNone/>
+            </a:pPr>
+            <a:endParaRPr lang="sv-SE" dirty="0"/>
+          </a:p>
+          <a:p>
+            <a:pPr marL="0" indent="0">
+              <a:buNone/>
+            </a:pPr>
+            <a:r>
+              <a:rPr lang="sv-SE" dirty="0"/>
+              <a:t>Lägst försäljning – Skönhet</a:t>
+            </a:r>
+            <a:br>
+              <a:rPr lang="sv-SE" dirty="0"/>
+            </a:br>
+            <a:r>
+              <a:rPr lang="sv-SE" dirty="0"/>
+              <a:t>Omsättning – 13 020</a:t>
+            </a:r>
+          </a:p>
+          <a:p>
+            <a:pPr marL="0" indent="0">
+              <a:buNone/>
+            </a:pPr>
+            <a:endParaRPr lang="sv-SE" dirty="0"/>
+          </a:p>
+          <a:p>
+            <a:pPr marL="0" indent="0">
+              <a:buNone/>
+            </a:pPr>
+            <a:r>
+              <a:rPr lang="sv-SE" dirty="0"/>
+              <a:t>Störst returgrad hade Kök, hudvård och laptops</a:t>
+            </a:r>
+            <a:br>
+              <a:rPr lang="sv-SE" dirty="0"/>
+            </a:br>
+            <a:r>
+              <a:rPr lang="sv-SE" dirty="0"/>
+              <a:t>Procent 22,6%, 22,0% och 18,3%</a:t>
+            </a:r>
+          </a:p>
+          <a:p>
+            <a:pPr marL="0" indent="0">
+              <a:buNone/>
+            </a:pPr>
+            <a:endParaRPr lang="sv-SE" dirty="0"/>
+          </a:p>
+          <a:p>
+            <a:pPr marL="0" indent="0">
+              <a:buNone/>
+            </a:pPr>
+            <a:r>
+              <a:rPr lang="sv-SE" dirty="0"/>
+              <a:t>Betalningsmetoder står kort för 44,2% av alla köp och </a:t>
             </a:r>
             <a:r>
               <a:rPr lang="sv-SE" dirty="0" err="1"/>
-              <a:t>datat</a:t>
+              <a:t>Paypal</a:t>
             </a:r>
             <a:r>
               <a:rPr lang="sv-SE" dirty="0"/>
-              <a:t> när det gäller intäkter.</a:t>
-            </a:r>
-          </a:p>
+              <a:t> 8,1%</a:t>
+            </a:r>
+          </a:p>
+        </p:txBody>
+      </p:sp>
+      <p:sp>
+        <p:nvSpPr>
+          <p:cNvPr id="4" name="Platshållare för innehåll 2">
+            <a:extLst>
+              <a:ext uri="{FF2B5EF4-FFF2-40B4-BE49-F238E27FC236}">
+                <a16:creationId xmlns:a16="http://schemas.microsoft.com/office/drawing/2014/main" id="{4323BC24-0AD7-6231-FE49-3509435959E4}"/>
+              </a:ext>
+            </a:extLst>
+          </p:cNvPr>
+          <p:cNvSpPr txBox="1">
+            <a:spLocks/>
+          </p:cNvSpPr>
+          <p:nvPr/>
+        </p:nvSpPr>
+        <p:spPr>
+          <a:xfrm>
+            <a:off x="736600" y="6080125"/>
+            <a:ext cx="10515600" cy="4351338"/>
+          </a:xfrm>
+          <a:prstGeom prst="rect">
+            <a:avLst/>
+          </a:prstGeom>
+        </p:spPr>
+        <p:txBody>
+          <a:bodyPr vert="horz" lIns="91440" tIns="45720" rIns="91440" bIns="45720" rtlCol="0">
+            <a:normAutofit/>
+          </a:bodyPr>
+          <a:lstStyle>
+            <a:lvl1pPr marL="228600" indent="-228600" algn="l" defTabSz="914400" rtl="0" eaLnBrk="1" latinLnBrk="0" hangingPunct="1">
+              <a:lnSpc>
+                <a:spcPct val="90000"/>
+              </a:lnSpc>
+              <a:spcBef>
+                <a:spcPts val="1000"/>
+              </a:spcBef>
+              <a:buFont typeface="Arial" panose="020B0604020202020204" pitchFamily="34" charset="0"/>
+              <a:buChar char="•"/>
+              <a:defRPr sz="2800" kern="1200">
+                <a:solidFill>
+                  <a:schemeClr val="tx1"/>
+                </a:solidFill>
+                <a:latin typeface="+mn-lt"/>
+                <a:ea typeface="+mn-ea"/>
+                <a:cs typeface="+mn-cs"/>
+              </a:defRPr>
+            </a:lvl1pPr>
+            <a:lvl2pPr marL="685800" indent="-228600" algn="l" defTabSz="914400" rtl="0" eaLnBrk="1" latinLnBrk="0" hangingPunct="1">
+              <a:lnSpc>
+                <a:spcPct val="90000"/>
+              </a:lnSpc>
+              <a:spcBef>
+                <a:spcPts val="500"/>
+              </a:spcBef>
+              <a:buFont typeface="Arial" panose="020B0604020202020204" pitchFamily="34" charset="0"/>
+              <a:buChar char="•"/>
+              <a:defRPr sz="2400" kern="1200">
+                <a:solidFill>
+                  <a:schemeClr val="tx1"/>
+                </a:solidFill>
+                <a:latin typeface="+mn-lt"/>
+                <a:ea typeface="+mn-ea"/>
+                <a:cs typeface="+mn-cs"/>
+              </a:defRPr>
+            </a:lvl2pPr>
+            <a:lvl3pPr marL="1143000" indent="-228600" algn="l" defTabSz="914400" rtl="0" eaLnBrk="1" latinLnBrk="0" hangingPunct="1">
+              <a:lnSpc>
+                <a:spcPct val="90000"/>
+              </a:lnSpc>
+              <a:spcBef>
+                <a:spcPts val="500"/>
+              </a:spcBef>
+              <a:buFont typeface="Arial" panose="020B0604020202020204" pitchFamily="34" charset="0"/>
+              <a:buChar char="•"/>
+              <a:defRPr sz="2000" kern="1200">
+                <a:solidFill>
+                  <a:schemeClr val="tx1"/>
+                </a:solidFill>
+                <a:latin typeface="+mn-lt"/>
+                <a:ea typeface="+mn-ea"/>
+                <a:cs typeface="+mn-cs"/>
+              </a:defRPr>
+            </a:lvl3pPr>
+            <a:lvl4pPr marL="1600200" indent="-228600" algn="l" defTabSz="914400" rtl="0" eaLnBrk="1" latinLnBrk="0" hangingPunct="1">
+              <a:lnSpc>
+                <a:spcPct val="90000"/>
+              </a:lnSpc>
+              <a:spcBef>
+                <a:spcPts val="500"/>
+              </a:spcBef>
+              <a:buFont typeface="Arial" panose="020B0604020202020204" pitchFamily="34" charset="0"/>
+              <a:buChar char="•"/>
+              <a:defRPr sz="1800" kern="1200">
+                <a:solidFill>
+                  <a:schemeClr val="tx1"/>
+                </a:solidFill>
+                <a:latin typeface="+mn-lt"/>
+                <a:ea typeface="+mn-ea"/>
+                <a:cs typeface="+mn-cs"/>
+              </a:defRPr>
+            </a:lvl4pPr>
+            <a:lvl5pPr marL="2057400" indent="-228600" algn="l" defTabSz="914400" rtl="0" eaLnBrk="1" latinLnBrk="0" hangingPunct="1">
+              <a:lnSpc>
+                <a:spcPct val="90000"/>
+              </a:lnSpc>
+              <a:spcBef>
+                <a:spcPts val="500"/>
+              </a:spcBef>
+              <a:buFont typeface="Arial" panose="020B0604020202020204" pitchFamily="34" charset="0"/>
+              <a:buChar char="•"/>
+              <a:defRPr sz="1800" kern="1200">
+                <a:solidFill>
+                  <a:schemeClr val="tx1"/>
+                </a:solidFill>
+                <a:latin typeface="+mn-lt"/>
+                <a:ea typeface="+mn-ea"/>
+                <a:cs typeface="+mn-cs"/>
+              </a:defRPr>
+            </a:lvl5pPr>
+            <a:lvl6pPr marL="2514600" indent="-228600" algn="l" defTabSz="914400" rtl="0" eaLnBrk="1" latinLnBrk="0" hangingPunct="1">
+              <a:lnSpc>
+                <a:spcPct val="90000"/>
+              </a:lnSpc>
+              <a:spcBef>
+                <a:spcPts val="500"/>
+              </a:spcBef>
+              <a:buFont typeface="Arial" panose="020B0604020202020204" pitchFamily="34" charset="0"/>
+              <a:buChar char="•"/>
+              <a:defRPr sz="1800" kern="1200">
+                <a:solidFill>
+                  <a:schemeClr val="tx1"/>
+                </a:solidFill>
+                <a:latin typeface="+mn-lt"/>
+                <a:ea typeface="+mn-ea"/>
+                <a:cs typeface="+mn-cs"/>
+              </a:defRPr>
+            </a:lvl6pPr>
+            <a:lvl7pPr marL="2971800" indent="-228600" algn="l" defTabSz="914400" rtl="0" eaLnBrk="1" latinLnBrk="0" hangingPunct="1">
+              <a:lnSpc>
+                <a:spcPct val="90000"/>
+              </a:lnSpc>
+              <a:spcBef>
+                <a:spcPts val="500"/>
+              </a:spcBef>
+              <a:buFont typeface="Arial" panose="020B0604020202020204" pitchFamily="34" charset="0"/>
+              <a:buChar char="•"/>
+              <a:defRPr sz="1800" kern="1200">
+                <a:solidFill>
+                  <a:schemeClr val="tx1"/>
+                </a:solidFill>
+                <a:latin typeface="+mn-lt"/>
+                <a:ea typeface="+mn-ea"/>
+                <a:cs typeface="+mn-cs"/>
+              </a:defRPr>
+            </a:lvl7pPr>
+            <a:lvl8pPr marL="3429000" indent="-228600" algn="l" defTabSz="914400" rtl="0" eaLnBrk="1" latinLnBrk="0" hangingPunct="1">
+              <a:lnSpc>
+                <a:spcPct val="90000"/>
+              </a:lnSpc>
+              <a:spcBef>
+                <a:spcPts val="500"/>
+              </a:spcBef>
+              <a:buFont typeface="Arial" panose="020B0604020202020204" pitchFamily="34" charset="0"/>
+              <a:buChar char="•"/>
+              <a:defRPr sz="1800" kern="1200">
+                <a:solidFill>
+                  <a:schemeClr val="tx1"/>
+                </a:solidFill>
+                <a:latin typeface="+mn-lt"/>
+                <a:ea typeface="+mn-ea"/>
+                <a:cs typeface="+mn-cs"/>
+              </a:defRPr>
+            </a:lvl8pPr>
+            <a:lvl9pPr marL="3886200" indent="-228600" algn="l" defTabSz="914400" rtl="0" eaLnBrk="1" latinLnBrk="0" hangingPunct="1">
+              <a:lnSpc>
+                <a:spcPct val="90000"/>
+              </a:lnSpc>
+              <a:spcBef>
+                <a:spcPts val="500"/>
+              </a:spcBef>
+              <a:buFont typeface="Arial" panose="020B0604020202020204" pitchFamily="34" charset="0"/>
+              <a:buChar char="•"/>
+              <a:defRPr sz="1800" kern="1200">
+                <a:solidFill>
+                  <a:schemeClr val="tx1"/>
+                </a:solidFill>
+                <a:latin typeface="+mn-lt"/>
+                <a:ea typeface="+mn-ea"/>
+                <a:cs typeface="+mn-cs"/>
+              </a:defRPr>
+            </a:lvl9pPr>
+          </a:lstStyle>
           <a:p>
             <a:pPr marL="0" indent="0">
+              <a:buFont typeface="Arial" panose="020B0604020202020204" pitchFamily="34" charset="0"/>
               <a:buNone/>
             </a:pPr>
-            <a:r>
-              <a:rPr lang="sv-SE" dirty="0"/>
-              <a:t>När returgrad analyserades på underkategorinivå hade kök, hudvård och bärbar dator bland de högsta nivåerna, med returgrader på ungefär 22,6 procent, 22,0 procent respektive 18,3 procent. Samtidigt hade träning, hörlurar och cykling lägre returgrad. Det tyder på att vissa typer av produkter returneras oftare än andra.</a:t>
-            </a:r>
-          </a:p>
-          <a:p>
-            <a:pPr marL="0" indent="0">
-              <a:buNone/>
-            </a:pPr>
-            <a:r>
-              <a:rPr lang="sv-SE" dirty="0"/>
-              <a:t>Analysen visade också att </a:t>
-            </a:r>
-            <a:r>
-              <a:rPr lang="sv-SE" dirty="0" err="1"/>
-              <a:t>kundsegmentet</a:t>
-            </a:r>
-            <a:r>
-              <a:rPr lang="sv-SE" dirty="0"/>
-              <a:t> konsument stod för flest </a:t>
-            </a:r>
-            <a:r>
-              <a:rPr lang="sv-SE" dirty="0" err="1"/>
-              <a:t>ordrar</a:t>
-            </a:r>
-            <a:r>
-              <a:rPr lang="sv-SE" dirty="0"/>
-              <a:t>, totalt 529, medan region nord hade både flest </a:t>
-            </a:r>
-            <a:r>
-              <a:rPr lang="sv-SE" dirty="0" err="1"/>
-              <a:t>ordrar</a:t>
-            </a:r>
-            <a:r>
-              <a:rPr lang="sv-SE" dirty="0"/>
-              <a:t> och högst total försäljning. När betalningsmetoder jämfördes var kort den vanligaste metoden med 442 </a:t>
-            </a:r>
-            <a:r>
-              <a:rPr lang="sv-SE" dirty="0" err="1"/>
-              <a:t>ordrar</a:t>
-            </a:r>
-            <a:r>
-              <a:rPr lang="sv-SE" dirty="0"/>
-              <a:t>. Samtidigt</a:t>
-            </a:r>
+            <a:endParaRPr lang="sv-SE" dirty="0"/>
           </a:p>
         </p:txBody>
       </p:sp>

--- a/rapport_folder/Placeholder_PowerPoint.pptx
+++ b/rapport_folder/Placeholder_PowerPoint.pptx
@@ -4310,10 +4310,10 @@
       </p:sp>
       <p:pic>
         <p:nvPicPr>
-          <p:cNvPr id="9" name="Platshållare för innehåll 8">
-            <a:extLst>
-              <a:ext uri="{FF2B5EF4-FFF2-40B4-BE49-F238E27FC236}">
-                <a16:creationId xmlns:a16="http://schemas.microsoft.com/office/drawing/2014/main" id="{6B5F6972-28A2-BCF9-D171-6E4C8E4DC808}"/>
+          <p:cNvPr id="7" name="Platshållare för innehåll 6">
+            <a:extLst>
+              <a:ext uri="{FF2B5EF4-FFF2-40B4-BE49-F238E27FC236}">
+                <a16:creationId xmlns:a16="http://schemas.microsoft.com/office/drawing/2014/main" id="{A44FC3A2-5822-CAC9-0955-E590189AFA64}"/>
               </a:ext>
             </a:extLst>
           </p:cNvPr>
@@ -4336,14 +4336,24 @@
             <a:fillRect/>
           </a:stretch>
         </p:blipFill>
-        <p:spPr>
+        <p:spPr bwMode="auto">
           <a:xfrm>
-            <a:off x="2770704" y="1825625"/>
-            <a:ext cx="6650592" cy="4351338"/>
+            <a:off x="2897939" y="1825625"/>
+            <a:ext cx="6396121" cy="4351338"/>
           </a:xfrm>
           <a:prstGeom prst="rect">
             <a:avLst/>
           </a:prstGeom>
+          <a:noFill/>
+          <a:extLst>
+            <a:ext uri="{909E8E84-426E-40DD-AFC4-6F175D3DCCD1}">
+              <a14:hiddenFill xmlns:a14="http://schemas.microsoft.com/office/drawing/2010/main">
+                <a:solidFill>
+                  <a:srgbClr val="FFFFFF"/>
+                </a:solidFill>
+              </a14:hiddenFill>
+            </a:ext>
+          </a:extLst>
         </p:spPr>
       </p:pic>
     </p:spTree>

--- a/rapport_folder/Placeholder_PowerPoint.pptx
+++ b/rapport_folder/Placeholder_PowerPoint.pptx
@@ -11,7 +11,7 @@
     <p:sldId id="259" r:id="rId5"/>
     <p:sldId id="260" r:id="rId6"/>
     <p:sldId id="261" r:id="rId7"/>
-    <p:sldId id="262" r:id="rId8"/>
+    <p:sldId id="263" r:id="rId8"/>
   </p:sldIdLst>
   <p:sldSz cx="12192000" cy="6858000"/>
   <p:notesSz cx="6858000" cy="9144000"/>
@@ -121,7 +121,7 @@
 <file path=ppt/revisionInfo.xml><?xml version="1.0" encoding="utf-8"?>
 <p1510:revInfo xmlns:a="http://schemas.openxmlformats.org/drawingml/2006/main" xmlns:r="http://schemas.openxmlformats.org/officeDocument/2006/relationships" xmlns:p1510="http://schemas.microsoft.com/office/powerpoint/2015/10/main">
   <p1510:revLst>
-    <p1510:client id="{C80DAAF8-6D02-4C02-B44C-E6EC11291832}" v="24" dt="2026-04-22T07:31:13.348"/>
+    <p1510:client id="{C80DAAF8-6D02-4C02-B44C-E6EC11291832}" v="26" dt="2026-04-22T14:39:35.592"/>
   </p1510:revLst>
 </p1510:revInfo>
 </file>
@@ -130,8 +130,8 @@
 <pc:chgInfo xmlns:a="http://schemas.openxmlformats.org/drawingml/2006/main" xmlns:r="http://schemas.openxmlformats.org/officeDocument/2006/relationships" xmlns:ac="http://schemas.microsoft.com/office/drawing/2013/main/command" xmlns:pc="http://schemas.microsoft.com/office/powerpoint/2013/main/command">
   <pc:docChgLst>
     <pc:chgData name="Jonas Lindström" userId="e2164e0498dd284e" providerId="LiveId" clId="{7A0E95E1-3C7A-43FC-80A2-7D6B146ED67F}"/>
-    <pc:docChg chg="undo custSel addSld modSld sldOrd">
-      <pc:chgData name="Jonas Lindström" userId="e2164e0498dd284e" providerId="LiveId" clId="{7A0E95E1-3C7A-43FC-80A2-7D6B146ED67F}" dt="2026-04-22T07:41:05.092" v="1020" actId="1076"/>
+    <pc:docChg chg="undo custSel addSld delSld modSld sldOrd">
+      <pc:chgData name="Jonas Lindström" userId="e2164e0498dd284e" providerId="LiveId" clId="{7A0E95E1-3C7A-43FC-80A2-7D6B146ED67F}" dt="2026-04-22T15:02:56.459" v="1050" actId="26606"/>
       <pc:docMkLst>
         <pc:docMk/>
       </pc:docMkLst>
@@ -228,14 +228,14 @@
           </ac:picMkLst>
         </pc:picChg>
       </pc:sldChg>
-      <pc:sldChg chg="addSp delSp modSp new mod">
-        <pc:chgData name="Jonas Lindström" userId="e2164e0498dd284e" providerId="LiveId" clId="{7A0E95E1-3C7A-43FC-80A2-7D6B146ED67F}" dt="2026-04-21T16:10:19.411" v="240" actId="931"/>
+      <pc:sldChg chg="addSp delSp modSp new mod setBg addAnim delAnim">
+        <pc:chgData name="Jonas Lindström" userId="e2164e0498dd284e" providerId="LiveId" clId="{7A0E95E1-3C7A-43FC-80A2-7D6B146ED67F}" dt="2026-04-22T15:02:56.459" v="1050" actId="26606"/>
         <pc:sldMkLst>
           <pc:docMk/>
           <pc:sldMk cId="3008716438" sldId="259"/>
         </pc:sldMkLst>
-        <pc:spChg chg="mod">
-          <ac:chgData name="Jonas Lindström" userId="e2164e0498dd284e" providerId="LiveId" clId="{7A0E95E1-3C7A-43FC-80A2-7D6B146ED67F}" dt="2026-04-21T16:09:03.834" v="237" actId="122"/>
+        <pc:spChg chg="mod ord">
+          <ac:chgData name="Jonas Lindström" userId="e2164e0498dd284e" providerId="LiveId" clId="{7A0E95E1-3C7A-43FC-80A2-7D6B146ED67F}" dt="2026-04-22T15:02:56.458" v="1049" actId="26606"/>
           <ac:spMkLst>
             <pc:docMk/>
             <pc:sldMk cId="3008716438" sldId="259"/>
@@ -251,11 +251,155 @@
           </ac:spMkLst>
         </pc:spChg>
         <pc:spChg chg="add del mod">
+          <ac:chgData name="Jonas Lindström" userId="e2164e0498dd284e" providerId="LiveId" clId="{7A0E95E1-3C7A-43FC-80A2-7D6B146ED67F}" dt="2026-04-22T15:01:39.693" v="1032" actId="478"/>
+          <ac:spMkLst>
+            <pc:docMk/>
+            <pc:sldMk cId="3008716438" sldId="259"/>
+            <ac:spMk id="4" creationId="{B6565E24-2C26-83C8-CE31-3A78CD8AD11B}"/>
+          </ac:spMkLst>
+        </pc:spChg>
+        <pc:spChg chg="add del mod">
           <ac:chgData name="Jonas Lindström" userId="e2164e0498dd284e" providerId="LiveId" clId="{7A0E95E1-3C7A-43FC-80A2-7D6B146ED67F}" dt="2026-04-21T16:10:19.411" v="240" actId="931"/>
           <ac:spMkLst>
             <pc:docMk/>
             <pc:sldMk cId="3008716438" sldId="259"/>
             <ac:spMk id="7" creationId="{41A84F87-16AC-7CC6-1EB6-DEF2DB35480B}"/>
+          </ac:spMkLst>
+        </pc:spChg>
+        <pc:spChg chg="add del">
+          <ac:chgData name="Jonas Lindström" userId="e2164e0498dd284e" providerId="LiveId" clId="{7A0E95E1-3C7A-43FC-80A2-7D6B146ED67F}" dt="2026-04-22T15:02:56.459" v="1050" actId="26606"/>
+          <ac:spMkLst>
+            <pc:docMk/>
+            <pc:sldMk cId="3008716438" sldId="259"/>
+            <ac:spMk id="11" creationId="{D12DDE76-C203-4047-9998-63900085B5E8}"/>
+          </ac:spMkLst>
+        </pc:spChg>
+        <pc:spChg chg="add del">
+          <ac:chgData name="Jonas Lindström" userId="e2164e0498dd284e" providerId="LiveId" clId="{7A0E95E1-3C7A-43FC-80A2-7D6B146ED67F}" dt="2026-04-22T15:02:37.793" v="1040" actId="26606"/>
+          <ac:spMkLst>
+            <pc:docMk/>
+            <pc:sldMk cId="3008716438" sldId="259"/>
+            <ac:spMk id="16" creationId="{7DA3C418-758E-4180-A5D0-8655D6804587}"/>
+          </ac:spMkLst>
+        </pc:spChg>
+        <pc:spChg chg="add del">
+          <ac:chgData name="Jonas Lindström" userId="e2164e0498dd284e" providerId="LiveId" clId="{7A0E95E1-3C7A-43FC-80A2-7D6B146ED67F}" dt="2026-04-22T15:02:37.793" v="1040" actId="26606"/>
+          <ac:spMkLst>
+            <pc:docMk/>
+            <pc:sldMk cId="3008716438" sldId="259"/>
+            <ac:spMk id="18" creationId="{28C8EF06-5EC3-4883-AFAF-D74FF46550FB}"/>
+          </ac:spMkLst>
+        </pc:spChg>
+        <pc:spChg chg="add del">
+          <ac:chgData name="Jonas Lindström" userId="e2164e0498dd284e" providerId="LiveId" clId="{7A0E95E1-3C7A-43FC-80A2-7D6B146ED67F}" dt="2026-04-22T15:02:38.707" v="1042" actId="26606"/>
+          <ac:spMkLst>
+            <pc:docMk/>
+            <pc:sldMk cId="3008716438" sldId="259"/>
+            <ac:spMk id="20" creationId="{08C9B587-E65E-4B52-B37C-ABEBB6E87928}"/>
+          </ac:spMkLst>
+        </pc:spChg>
+        <pc:spChg chg="add del">
+          <ac:chgData name="Jonas Lindström" userId="e2164e0498dd284e" providerId="LiveId" clId="{7A0E95E1-3C7A-43FC-80A2-7D6B146ED67F}" dt="2026-04-22T15:02:38.707" v="1042" actId="26606"/>
+          <ac:spMkLst>
+            <pc:docMk/>
+            <pc:sldMk cId="3008716438" sldId="259"/>
+            <ac:spMk id="21" creationId="{68AF5748-FED8-45BA-8631-26D1D10F3246}"/>
+          </ac:spMkLst>
+        </pc:spChg>
+        <pc:spChg chg="add del">
+          <ac:chgData name="Jonas Lindström" userId="e2164e0498dd284e" providerId="LiveId" clId="{7A0E95E1-3C7A-43FC-80A2-7D6B146ED67F}" dt="2026-04-22T15:02:38.707" v="1042" actId="26606"/>
+          <ac:spMkLst>
+            <pc:docMk/>
+            <pc:sldMk cId="3008716438" sldId="259"/>
+            <ac:spMk id="22" creationId="{AF2F604E-43BE-4DC3-B983-E071523364F8}"/>
+          </ac:spMkLst>
+        </pc:spChg>
+        <pc:spChg chg="add del">
+          <ac:chgData name="Jonas Lindström" userId="e2164e0498dd284e" providerId="LiveId" clId="{7A0E95E1-3C7A-43FC-80A2-7D6B146ED67F}" dt="2026-04-22T15:02:45.187" v="1045" actId="26606"/>
+          <ac:spMkLst>
+            <pc:docMk/>
+            <pc:sldMk cId="3008716438" sldId="259"/>
+            <ac:spMk id="24" creationId="{7DA3C418-758E-4180-A5D0-8655D6804587}"/>
+          </ac:spMkLst>
+        </pc:spChg>
+        <pc:spChg chg="add del">
+          <ac:chgData name="Jonas Lindström" userId="e2164e0498dd284e" providerId="LiveId" clId="{7A0E95E1-3C7A-43FC-80A2-7D6B146ED67F}" dt="2026-04-22T15:02:45.187" v="1045" actId="26606"/>
+          <ac:spMkLst>
+            <pc:docMk/>
+            <pc:sldMk cId="3008716438" sldId="259"/>
+            <ac:spMk id="25" creationId="{28C8EF06-5EC3-4883-AFAF-D74FF46550FB}"/>
+          </ac:spMkLst>
+        </pc:spChg>
+        <pc:spChg chg="add del">
+          <ac:chgData name="Jonas Lindström" userId="e2164e0498dd284e" providerId="LiveId" clId="{7A0E95E1-3C7A-43FC-80A2-7D6B146ED67F}" dt="2026-04-22T15:02:53.411" v="1047" actId="26606"/>
+          <ac:spMkLst>
+            <pc:docMk/>
+            <pc:sldMk cId="3008716438" sldId="259"/>
+            <ac:spMk id="27" creationId="{68AF5748-FED8-45BA-8631-26D1D10F3246}"/>
+          </ac:spMkLst>
+        </pc:spChg>
+        <pc:spChg chg="add del">
+          <ac:chgData name="Jonas Lindström" userId="e2164e0498dd284e" providerId="LiveId" clId="{7A0E95E1-3C7A-43FC-80A2-7D6B146ED67F}" dt="2026-04-22T15:02:53.411" v="1047" actId="26606"/>
+          <ac:spMkLst>
+            <pc:docMk/>
+            <pc:sldMk cId="3008716438" sldId="259"/>
+            <ac:spMk id="28" creationId="{AF2F604E-43BE-4DC3-B983-E071523364F8}"/>
+          </ac:spMkLst>
+        </pc:spChg>
+        <pc:spChg chg="add del">
+          <ac:chgData name="Jonas Lindström" userId="e2164e0498dd284e" providerId="LiveId" clId="{7A0E95E1-3C7A-43FC-80A2-7D6B146ED67F}" dt="2026-04-22T15:02:53.411" v="1047" actId="26606"/>
+          <ac:spMkLst>
+            <pc:docMk/>
+            <pc:sldMk cId="3008716438" sldId="259"/>
+            <ac:spMk id="29" creationId="{08C9B587-E65E-4B52-B37C-ABEBB6E87928}"/>
+          </ac:spMkLst>
+        </pc:spChg>
+        <pc:spChg chg="add del">
+          <ac:chgData name="Jonas Lindström" userId="e2164e0498dd284e" providerId="LiveId" clId="{7A0E95E1-3C7A-43FC-80A2-7D6B146ED67F}" dt="2026-04-22T15:02:56.458" v="1049" actId="26606"/>
+          <ac:spMkLst>
+            <pc:docMk/>
+            <pc:sldMk cId="3008716438" sldId="259"/>
+            <ac:spMk id="31" creationId="{A8384FB5-9ADC-4DDC-881B-597D56F5B15D}"/>
+          </ac:spMkLst>
+        </pc:spChg>
+        <pc:spChg chg="add del">
+          <ac:chgData name="Jonas Lindström" userId="e2164e0498dd284e" providerId="LiveId" clId="{7A0E95E1-3C7A-43FC-80A2-7D6B146ED67F}" dt="2026-04-22T15:02:56.458" v="1049" actId="26606"/>
+          <ac:spMkLst>
+            <pc:docMk/>
+            <pc:sldMk cId="3008716438" sldId="259"/>
+            <ac:spMk id="32" creationId="{91E5A9A7-95C6-4F4F-B00E-C82E07FE62EF}"/>
+          </ac:spMkLst>
+        </pc:spChg>
+        <pc:spChg chg="add del">
+          <ac:chgData name="Jonas Lindström" userId="e2164e0498dd284e" providerId="LiveId" clId="{7A0E95E1-3C7A-43FC-80A2-7D6B146ED67F}" dt="2026-04-22T15:02:56.458" v="1049" actId="26606"/>
+          <ac:spMkLst>
+            <pc:docMk/>
+            <pc:sldMk cId="3008716438" sldId="259"/>
+            <ac:spMk id="33" creationId="{D07DD2DE-F619-49DD-B5E7-03A290FF4ED1}"/>
+          </ac:spMkLst>
+        </pc:spChg>
+        <pc:spChg chg="add del">
+          <ac:chgData name="Jonas Lindström" userId="e2164e0498dd284e" providerId="LiveId" clId="{7A0E95E1-3C7A-43FC-80A2-7D6B146ED67F}" dt="2026-04-22T15:02:56.458" v="1049" actId="26606"/>
+          <ac:spMkLst>
+            <pc:docMk/>
+            <pc:sldMk cId="3008716438" sldId="259"/>
+            <ac:spMk id="34" creationId="{85149191-5F60-4A28-AAFF-039F96B0F3EC}"/>
+          </ac:spMkLst>
+        </pc:spChg>
+        <pc:spChg chg="add del">
+          <ac:chgData name="Jonas Lindström" userId="e2164e0498dd284e" providerId="LiveId" clId="{7A0E95E1-3C7A-43FC-80A2-7D6B146ED67F}" dt="2026-04-22T15:02:56.458" v="1049" actId="26606"/>
+          <ac:spMkLst>
+            <pc:docMk/>
+            <pc:sldMk cId="3008716438" sldId="259"/>
+            <ac:spMk id="35" creationId="{F8260ED5-17F7-4158-B241-D51DD4CF1B7E}"/>
+          </ac:spMkLst>
+        </pc:spChg>
+        <pc:spChg chg="add">
+          <ac:chgData name="Jonas Lindström" userId="e2164e0498dd284e" providerId="LiveId" clId="{7A0E95E1-3C7A-43FC-80A2-7D6B146ED67F}" dt="2026-04-22T15:02:56.459" v="1050" actId="26606"/>
+          <ac:spMkLst>
+            <pc:docMk/>
+            <pc:sldMk cId="3008716438" sldId="259"/>
+            <ac:spMk id="37" creationId="{D12DDE76-C203-4047-9998-63900085B5E8}"/>
           </ac:spMkLst>
         </pc:spChg>
         <pc:picChg chg="add del mod ord">
@@ -266,8 +410,16 @@
             <ac:picMk id="5" creationId="{AD20202C-3DCB-C9F6-BDC8-BED38F91EC32}"/>
           </ac:picMkLst>
         </pc:picChg>
-        <pc:picChg chg="add mod ord">
-          <ac:chgData name="Jonas Lindström" userId="e2164e0498dd284e" providerId="LiveId" clId="{7A0E95E1-3C7A-43FC-80A2-7D6B146ED67F}" dt="2026-04-21T16:10:19.411" v="240" actId="931"/>
+        <pc:picChg chg="add mod">
+          <ac:chgData name="Jonas Lindström" userId="e2164e0498dd284e" providerId="LiveId" clId="{7A0E95E1-3C7A-43FC-80A2-7D6B146ED67F}" dt="2026-04-22T15:02:56.458" v="1049" actId="26606"/>
+          <ac:picMkLst>
+            <pc:docMk/>
+            <pc:sldMk cId="3008716438" sldId="259"/>
+            <ac:picMk id="6" creationId="{46380EC7-E50C-FA10-70FA-73332ADF885F}"/>
+          </ac:picMkLst>
+        </pc:picChg>
+        <pc:picChg chg="add del mod ord">
+          <ac:chgData name="Jonas Lindström" userId="e2164e0498dd284e" providerId="LiveId" clId="{7A0E95E1-3C7A-43FC-80A2-7D6B146ED67F}" dt="2026-04-22T15:01:35.481" v="1031" actId="478"/>
           <ac:picMkLst>
             <pc:docMk/>
             <pc:sldMk cId="3008716438" sldId="259"/>
@@ -345,8 +497,8 @@
           </ac:spMkLst>
         </pc:spChg>
       </pc:sldChg>
-      <pc:sldChg chg="modSp new mod">
-        <pc:chgData name="Jonas Lindström" userId="e2164e0498dd284e" providerId="LiveId" clId="{7A0E95E1-3C7A-43FC-80A2-7D6B146ED67F}" dt="2026-04-21T16:14:09.113" v="271" actId="27636"/>
+      <pc:sldChg chg="modSp new del mod">
+        <pc:chgData name="Jonas Lindström" userId="e2164e0498dd284e" providerId="LiveId" clId="{7A0E95E1-3C7A-43FC-80A2-7D6B146ED67F}" dt="2026-04-22T14:44:42.252" v="1030" actId="47"/>
         <pc:sldMkLst>
           <pc:docMk/>
           <pc:sldMk cId="37354508" sldId="262"/>
@@ -365,6 +517,29 @@
             <pc:docMk/>
             <pc:sldMk cId="37354508" sldId="262"/>
             <ac:spMk id="3" creationId="{C6752EDE-C581-D3E7-715A-B5697DC5583E}"/>
+          </ac:spMkLst>
+        </pc:spChg>
+      </pc:sldChg>
+      <pc:sldChg chg="modSp new mod">
+        <pc:chgData name="Jonas Lindström" userId="e2164e0498dd284e" providerId="LiveId" clId="{7A0E95E1-3C7A-43FC-80A2-7D6B146ED67F}" dt="2026-04-22T14:41:58.308" v="1029" actId="14100"/>
+        <pc:sldMkLst>
+          <pc:docMk/>
+          <pc:sldMk cId="568749270" sldId="263"/>
+        </pc:sldMkLst>
+        <pc:spChg chg="mod">
+          <ac:chgData name="Jonas Lindström" userId="e2164e0498dd284e" providerId="LiveId" clId="{7A0E95E1-3C7A-43FC-80A2-7D6B146ED67F}" dt="2026-04-22T14:41:58.308" v="1029" actId="14100"/>
+          <ac:spMkLst>
+            <pc:docMk/>
+            <pc:sldMk cId="568749270" sldId="263"/>
+            <ac:spMk id="2" creationId="{418139D9-5534-2D85-9A78-08B1CE5CB4A3}"/>
+          </ac:spMkLst>
+        </pc:spChg>
+        <pc:spChg chg="mod">
+          <ac:chgData name="Jonas Lindström" userId="e2164e0498dd284e" providerId="LiveId" clId="{7A0E95E1-3C7A-43FC-80A2-7D6B146ED67F}" dt="2026-04-22T14:39:50.188" v="1027" actId="5793"/>
+          <ac:spMkLst>
+            <pc:docMk/>
+            <pc:sldMk cId="568749270" sldId="263"/>
+            <ac:spMk id="3" creationId="{9BD92789-070F-DBBD-5ED3-A7443C5E8414}"/>
           </ac:spMkLst>
         </pc:spChg>
       </pc:sldChg>
@@ -4263,6 +4438,14 @@
 <file path=ppt/slides/slide4.xml><?xml version="1.0" encoding="utf-8"?>
 <p:sld xmlns:a="http://schemas.openxmlformats.org/drawingml/2006/main" xmlns:r="http://schemas.openxmlformats.org/officeDocument/2006/relationships" xmlns:p="http://schemas.openxmlformats.org/presentationml/2006/main">
   <p:cSld>
+    <p:bg>
+      <p:bgPr>
+        <a:solidFill>
+          <a:schemeClr val="bg1"/>
+        </a:solidFill>
+        <a:effectLst/>
+      </p:bgPr>
+    </p:bg>
     <p:spTree>
       <p:nvGrpSpPr>
         <p:cNvPr id="1" name=""/>
@@ -4279,6 +4462,69 @@
       </p:grpSpPr>
       <p:sp>
         <p:nvSpPr>
+          <p:cNvPr id="37" name="Flowchart: Document 15">
+            <a:extLst>
+              <a:ext uri="{FF2B5EF4-FFF2-40B4-BE49-F238E27FC236}">
+                <a16:creationId xmlns:a16="http://schemas.microsoft.com/office/drawing/2014/main" id="{D12DDE76-C203-4047-9998-63900085B5E8}"/>
+              </a:ext>
+              <a:ext uri="{C183D7F6-B498-43B3-948B-1728B52AA6E4}">
+                <adec:decorative xmlns:adec="http://schemas.microsoft.com/office/drawing/2017/decorative" val="1"/>
+              </a:ext>
+            </a:extLst>
+          </p:cNvPr>
+          <p:cNvSpPr>
+            <a:spLocks noGrp="1" noRot="1" noChangeAspect="1" noMove="1" noResize="1" noEditPoints="1" noAdjustHandles="1" noChangeArrowheads="1" noChangeShapeType="1" noTextEdit="1"/>
+          </p:cNvSpPr>
+          <p:nvPr>
+            <p:extLst>
+              <p:ext uri="{386F3935-93C4-4BCD-93E2-E3B085C9AB24}">
+                <p16:designElem xmlns:p16="http://schemas.microsoft.com/office/powerpoint/2015/main" val="1"/>
+              </p:ext>
+            </p:extLst>
+          </p:nvPr>
+        </p:nvSpPr>
+        <p:spPr>
+          <a:xfrm>
+            <a:off x="638175" y="0"/>
+            <a:ext cx="3248025" cy="3400426"/>
+          </a:xfrm>
+          <a:prstGeom prst="flowChartDocument">
+            <a:avLst/>
+          </a:prstGeom>
+          <a:solidFill>
+            <a:schemeClr val="accent1"/>
+          </a:solidFill>
+          <a:ln>
+            <a:noFill/>
+          </a:ln>
+        </p:spPr>
+        <p:style>
+          <a:lnRef idx="2">
+            <a:schemeClr val="accent1">
+              <a:shade val="50000"/>
+            </a:schemeClr>
+          </a:lnRef>
+          <a:fillRef idx="1">
+            <a:schemeClr val="accent1"/>
+          </a:fillRef>
+          <a:effectRef idx="0">
+            <a:schemeClr val="accent1"/>
+          </a:effectRef>
+          <a:fontRef idx="minor">
+            <a:schemeClr val="lt1"/>
+          </a:fontRef>
+        </p:style>
+        <p:txBody>
+          <a:bodyPr rtlCol="0" anchor="ctr"/>
+          <a:lstStyle/>
+          <a:p>
+            <a:pPr algn="ctr"/>
+            <a:endParaRPr lang="en-US"/>
+          </a:p>
+        </p:txBody>
+      </p:sp>
+      <p:sp>
+        <p:nvSpPr>
           <p:cNvPr id="2" name="Rubrik 1">
             <a:extLst>
               <a:ext uri="{FF2B5EF4-FFF2-40B4-BE49-F238E27FC236}">
@@ -4293,16 +4539,27 @@
             <p:ph type="title"/>
           </p:nvPr>
         </p:nvSpPr>
-        <p:spPr/>
-        <p:txBody>
-          <a:bodyPr>
+        <p:spPr>
+          <a:xfrm>
+            <a:off x="838200" y="171162"/>
+            <a:ext cx="2840182" cy="2371148"/>
+          </a:xfrm>
+        </p:spPr>
+        <p:txBody>
+          <a:bodyPr vert="horz" lIns="91440" tIns="45720" rIns="91440" bIns="45720" rtlCol="0" anchor="ctr">
             <a:normAutofit/>
           </a:bodyPr>
           <a:lstStyle/>
           <a:p>
-            <a:pPr algn="ctr"/>
-            <a:r>
-              <a:rPr lang="sv-SE" sz="3600" dirty="0"/>
+            <a:r>
+              <a:rPr lang="en-US" sz="3200" kern="1200">
+                <a:solidFill>
+                  <a:srgbClr val="FFFFFF"/>
+                </a:solidFill>
+                <a:latin typeface="+mj-lt"/>
+                <a:ea typeface="+mj-ea"/>
+                <a:cs typeface="+mj-cs"/>
+              </a:rPr>
               <a:t>Hur skiljer sig returgrad mellan olika kategorier?</a:t>
             </a:r>
           </a:p>
@@ -4310,36 +4567,28 @@
       </p:sp>
       <p:pic>
         <p:nvPicPr>
-          <p:cNvPr id="9" name="Platshållare för innehåll 8">
-            <a:extLst>
-              <a:ext uri="{FF2B5EF4-FFF2-40B4-BE49-F238E27FC236}">
-                <a16:creationId xmlns:a16="http://schemas.microsoft.com/office/drawing/2014/main" id="{6B5F6972-28A2-BCF9-D171-6E4C8E4DC808}"/>
+          <p:cNvPr id="6" name="Bildobjekt 5">
+            <a:extLst>
+              <a:ext uri="{FF2B5EF4-FFF2-40B4-BE49-F238E27FC236}">
+                <a16:creationId xmlns:a16="http://schemas.microsoft.com/office/drawing/2014/main" id="{46380EC7-E50C-FA10-70FA-73332ADF885F}"/>
               </a:ext>
             </a:extLst>
           </p:cNvPr>
           <p:cNvPicPr>
-            <a:picLocks noGrp="1" noChangeAspect="1"/>
+            <a:picLocks noChangeAspect="1"/>
           </p:cNvPicPr>
-          <p:nvPr>
-            <p:ph idx="1"/>
-          </p:nvPr>
+          <p:nvPr/>
         </p:nvPicPr>
         <p:blipFill>
-          <a:blip r:embed="rId2">
-            <a:extLst>
-              <a:ext uri="{28A0092B-C50C-407E-A947-70E740481C1C}">
-                <a14:useLocalDpi xmlns:a14="http://schemas.microsoft.com/office/drawing/2010/main" val="0"/>
-              </a:ext>
-            </a:extLst>
-          </a:blip>
+          <a:blip r:embed="rId2"/>
           <a:stretch>
             <a:fillRect/>
           </a:stretch>
         </p:blipFill>
         <p:spPr>
           <a:xfrm>
-            <a:off x="2770704" y="1825625"/>
-            <a:ext cx="6650592" cy="4351338"/>
+            <a:off x="4207933" y="949694"/>
+            <a:ext cx="7347537" cy="4959587"/>
           </a:xfrm>
           <a:prstGeom prst="rect">
             <a:avLst/>
@@ -4888,7 +5137,7 @@
           <p:cNvPr id="2" name="Rubrik 1">
             <a:extLst>
               <a:ext uri="{FF2B5EF4-FFF2-40B4-BE49-F238E27FC236}">
-                <a16:creationId xmlns:a16="http://schemas.microsoft.com/office/drawing/2014/main" id="{EA936563-CED3-EFCF-2449-9D3F10BB5B66}"/>
+                <a16:creationId xmlns:a16="http://schemas.microsoft.com/office/drawing/2014/main" id="{418139D9-5534-2D85-9A78-08B1CE5CB4A3}"/>
               </a:ext>
             </a:extLst>
           </p:cNvPr>
@@ -4899,7 +5148,12 @@
             <p:ph type="title"/>
           </p:nvPr>
         </p:nvSpPr>
-        <p:spPr/>
+        <p:spPr>
+          <a:xfrm>
+            <a:off x="838200" y="365125"/>
+            <a:ext cx="10515600" cy="1247775"/>
+          </a:xfrm>
+        </p:spPr>
         <p:txBody>
           <a:bodyPr/>
           <a:lstStyle/>
@@ -4917,7 +5171,7 @@
           <p:cNvPr id="3" name="Platshållare för innehåll 2">
             <a:extLst>
               <a:ext uri="{FF2B5EF4-FFF2-40B4-BE49-F238E27FC236}">
-                <a16:creationId xmlns:a16="http://schemas.microsoft.com/office/drawing/2014/main" id="{C6752EDE-C581-D3E7-715A-B5697DC5583E}"/>
+                <a16:creationId xmlns:a16="http://schemas.microsoft.com/office/drawing/2014/main" id="{9BD92789-070F-DBBD-5ED3-A7443C5E8414}"/>
               </a:ext>
             </a:extLst>
           </p:cNvPr>
@@ -4931,7 +5185,7 @@
         <p:spPr/>
         <p:txBody>
           <a:bodyPr>
-            <a:normAutofit fontScale="92500"/>
+            <a:normAutofit fontScale="55000" lnSpcReduction="20000"/>
           </a:bodyPr>
           <a:lstStyle/>
           <a:p>
@@ -4939,43 +5193,154 @@
               <a:buNone/>
             </a:pPr>
             <a:r>
+              <a:rPr lang="sv-SE" b="1" dirty="0"/>
+              <a:t>Slutsatser</a:t>
+            </a:r>
+          </a:p>
+          <a:p>
+            <a:r>
               <a:rPr lang="sv-SE" dirty="0"/>
-              <a:t>Sammanfattningsvis visar analysen att företagets försäljning framför allt drivs av kategorin elektronik och att returgraden varierar tydligt mellan olika produktgrupper. Det finns också skillnader mellan regioner, kundsegment och betalningsmetoder, vilket kan vara relevant för framtida affärsbeslut.</a:t>
+              <a:t>Försäljningen drivs främst av kategorin </a:t>
+            </a:r>
+            <a:r>
+              <a:rPr lang="sv-SE" b="1" dirty="0"/>
+              <a:t>elektronik</a:t>
+            </a:r>
+            <a:r>
+              <a:rPr lang="sv-SE" dirty="0"/>
+              <a:t> </a:t>
+            </a:r>
+          </a:p>
+          <a:p>
+            <a:r>
+              <a:rPr lang="sv-SE" dirty="0"/>
+              <a:t>Returgraden varierar tydligt mellan olika produktgrupper </a:t>
+            </a:r>
+          </a:p>
+          <a:p>
+            <a:r>
+              <a:rPr lang="sv-SE" dirty="0"/>
+              <a:t>Skillnader finns mellan: </a:t>
+            </a:r>
+          </a:p>
+          <a:p>
+            <a:pPr lvl="1"/>
+            <a:r>
+              <a:rPr lang="sv-SE" dirty="0"/>
+              <a:t>Regioner </a:t>
+            </a:r>
+          </a:p>
+          <a:p>
+            <a:pPr lvl="1"/>
+            <a:r>
+              <a:rPr lang="sv-SE" dirty="0"/>
+              <a:t>Kundsegment </a:t>
+            </a:r>
+          </a:p>
+          <a:p>
+            <a:pPr lvl="1"/>
+            <a:r>
+              <a:rPr lang="sv-SE" dirty="0"/>
+              <a:t>Betalningsmetoder </a:t>
+            </a:r>
+          </a:p>
+          <a:p>
+            <a:r>
+              <a:rPr lang="sv-SE" dirty="0"/>
+              <a:t>Dessa variationer kan ge värdefulla insikter för affärsbeslut </a:t>
             </a:r>
           </a:p>
           <a:p>
             <a:pPr marL="0" indent="0">
               <a:buNone/>
             </a:pPr>
-            <a:endParaRPr lang="sv-SE"/>
+            <a:r>
+              <a:rPr lang="sv-SE" b="1" dirty="0"/>
+              <a:t>Begränsningar</a:t>
+            </a:r>
+          </a:p>
+          <a:p>
+            <a:r>
+              <a:rPr lang="sv-SE" dirty="0"/>
+              <a:t>Analysen är </a:t>
+            </a:r>
+            <a:r>
+              <a:rPr lang="sv-SE" b="1" dirty="0"/>
+              <a:t>beskrivande</a:t>
+            </a:r>
+            <a:r>
+              <a:rPr lang="sv-SE" dirty="0"/>
+              <a:t> – visar inte orsakssamband </a:t>
+            </a:r>
+          </a:p>
+          <a:p>
+            <a:r>
+              <a:rPr lang="sv-SE" dirty="0"/>
+              <a:t>Resultaten påverkas av hur </a:t>
+            </a:r>
+            <a:r>
+              <a:rPr lang="sv-SE" b="1" dirty="0"/>
+              <a:t>saknade värden</a:t>
+            </a:r>
+            <a:r>
+              <a:rPr lang="sv-SE" dirty="0"/>
+              <a:t> hanterats </a:t>
+            </a:r>
+          </a:p>
+          <a:p>
+            <a:r>
+              <a:rPr lang="sv-SE" dirty="0"/>
+              <a:t>Bygger endast på </a:t>
+            </a:r>
+            <a:r>
+              <a:rPr lang="sv-SE" b="1" dirty="0"/>
+              <a:t>ett </a:t>
+            </a:r>
+            <a:r>
+              <a:rPr lang="sv-SE" b="1" dirty="0" err="1"/>
+              <a:t>dataset</a:t>
+            </a:r>
+            <a:r>
+              <a:rPr lang="sv-SE" dirty="0"/>
+              <a:t> </a:t>
+            </a:r>
+          </a:p>
+          <a:p>
+            <a:r>
+              <a:rPr lang="sv-SE" dirty="0"/>
+              <a:t>Begränsad generaliserbarhet </a:t>
+            </a:r>
           </a:p>
           <a:p>
             <a:pPr marL="0" indent="0">
               <a:buNone/>
             </a:pPr>
             <a:r>
-              <a:rPr lang="sv-SE"/>
-              <a:t>En </a:t>
-            </a:r>
+              <a:rPr lang="sv-SE" b="1" dirty="0"/>
+              <a:t>Avslutning</a:t>
+            </a:r>
+          </a:p>
+          <a:p>
             <a:r>
               <a:rPr lang="sv-SE" dirty="0"/>
-              <a:t>begränsning är att analysen är beskrivande och därför inte kan visa säkra orsakssamband. Resultaten påverkas också av hur saknade värden har hanterats och av att analysen bygger på ett enda </a:t>
-            </a:r>
-            <a:r>
-              <a:rPr lang="sv-SE" dirty="0" err="1"/>
-              <a:t>dataset</a:t>
-            </a:r>
+              <a:t>Ger en tydlig överblick av verksamheten </a:t>
+            </a:r>
+          </a:p>
+          <a:p>
             <a:r>
               <a:rPr lang="sv-SE" dirty="0"/>
-              <a:t>. Trots detta ger analysen en tydlig överblick av verksamheten och kan fungera som ett bra underlag för vidare arbete.</a:t>
-            </a:r>
+              <a:t>Bra grund för vidare analys och datadrivna beslut</a:t>
+            </a:r>
+          </a:p>
+          <a:p>
+            <a:endParaRPr lang="sv-SE" dirty="0"/>
           </a:p>
         </p:txBody>
       </p:sp>
     </p:spTree>
     <p:extLst>
       <p:ext uri="{BB962C8B-B14F-4D97-AF65-F5344CB8AC3E}">
-        <p14:creationId xmlns:p14="http://schemas.microsoft.com/office/powerpoint/2010/main" val="37354508"/>
+        <p14:creationId xmlns:p14="http://schemas.microsoft.com/office/powerpoint/2010/main" val="568749270"/>
       </p:ext>
     </p:extLst>
   </p:cSld>
